--- a/resources/NGS_GE_report_baseline_v2.pptx
+++ b/resources/NGS_GE_report_baseline_v2.pptx
@@ -213,7 +213,7 @@
             <a:fld id="{B0AF433D-ACB8-475A-9DBB-3D1EBDB4B826}" type="datetimeFigureOut">
               <a:rPr lang="ko-KR" altLang="en-US" smtClean="0"/>
               <a:pPr/>
-              <a:t>2026. 2. 24.</a:t>
+              <a:t>2026. 3. 5.</a:t>
             </a:fld>
             <a:endParaRPr lang="ko-KR" altLang="en-US"/>
           </a:p>
@@ -748,7 +748,7 @@
             <a:fld id="{6DD992CD-CDBB-40CF-A1EE-0B1B8B43A805}" type="datetimeFigureOut">
               <a:rPr lang="ko-KR" altLang="en-US" smtClean="0"/>
               <a:pPr/>
-              <a:t>2026. 2. 24.</a:t>
+              <a:t>2026. 3. 5.</a:t>
             </a:fld>
             <a:endParaRPr lang="ko-KR" altLang="en-US"/>
           </a:p>
@@ -913,7 +913,7 @@
             <a:fld id="{6DD992CD-CDBB-40CF-A1EE-0B1B8B43A805}" type="datetimeFigureOut">
               <a:rPr lang="ko-KR" altLang="en-US" smtClean="0"/>
               <a:pPr/>
-              <a:t>2026. 2. 24.</a:t>
+              <a:t>2026. 3. 5.</a:t>
             </a:fld>
             <a:endParaRPr lang="ko-KR" altLang="en-US"/>
           </a:p>
@@ -1088,7 +1088,7 @@
             <a:fld id="{6DD992CD-CDBB-40CF-A1EE-0B1B8B43A805}" type="datetimeFigureOut">
               <a:rPr lang="ko-KR" altLang="en-US" smtClean="0"/>
               <a:pPr/>
-              <a:t>2026. 2. 24.</a:t>
+              <a:t>2026. 3. 5.</a:t>
             </a:fld>
             <a:endParaRPr lang="ko-KR" altLang="en-US"/>
           </a:p>
@@ -1253,7 +1253,7 @@
             <a:fld id="{6DD992CD-CDBB-40CF-A1EE-0B1B8B43A805}" type="datetimeFigureOut">
               <a:rPr lang="ko-KR" altLang="en-US" smtClean="0"/>
               <a:pPr/>
-              <a:t>2026. 2. 24.</a:t>
+              <a:t>2026. 3. 5.</a:t>
             </a:fld>
             <a:endParaRPr lang="ko-KR" altLang="en-US"/>
           </a:p>
@@ -1495,7 +1495,7 @@
             <a:fld id="{6DD992CD-CDBB-40CF-A1EE-0B1B8B43A805}" type="datetimeFigureOut">
               <a:rPr lang="ko-KR" altLang="en-US" smtClean="0"/>
               <a:pPr/>
-              <a:t>2026. 2. 24.</a:t>
+              <a:t>2026. 3. 5.</a:t>
             </a:fld>
             <a:endParaRPr lang="ko-KR" altLang="en-US"/>
           </a:p>
@@ -1777,7 +1777,7 @@
             <a:fld id="{6DD992CD-CDBB-40CF-A1EE-0B1B8B43A805}" type="datetimeFigureOut">
               <a:rPr lang="ko-KR" altLang="en-US" smtClean="0"/>
               <a:pPr/>
-              <a:t>2026. 2. 24.</a:t>
+              <a:t>2026. 3. 5.</a:t>
             </a:fld>
             <a:endParaRPr lang="ko-KR" altLang="en-US"/>
           </a:p>
@@ -2198,7 +2198,7 @@
             <a:fld id="{6DD992CD-CDBB-40CF-A1EE-0B1B8B43A805}" type="datetimeFigureOut">
               <a:rPr lang="ko-KR" altLang="en-US" smtClean="0"/>
               <a:pPr/>
-              <a:t>2026. 2. 24.</a:t>
+              <a:t>2026. 3. 5.</a:t>
             </a:fld>
             <a:endParaRPr lang="ko-KR" altLang="en-US"/>
           </a:p>
@@ -2312,7 +2312,7 @@
             <a:fld id="{6DD992CD-CDBB-40CF-A1EE-0B1B8B43A805}" type="datetimeFigureOut">
               <a:rPr lang="ko-KR" altLang="en-US" smtClean="0"/>
               <a:pPr/>
-              <a:t>2026. 2. 24.</a:t>
+              <a:t>2026. 3. 5.</a:t>
             </a:fld>
             <a:endParaRPr lang="ko-KR" altLang="en-US"/>
           </a:p>
@@ -2404,7 +2404,7 @@
             <a:fld id="{6DD992CD-CDBB-40CF-A1EE-0B1B8B43A805}" type="datetimeFigureOut">
               <a:rPr lang="ko-KR" altLang="en-US" smtClean="0"/>
               <a:pPr/>
-              <a:t>2026. 2. 24.</a:t>
+              <a:t>2026. 3. 5.</a:t>
             </a:fld>
             <a:endParaRPr lang="ko-KR" altLang="en-US"/>
           </a:p>
@@ -2676,7 +2676,7 @@
             <a:fld id="{6DD992CD-CDBB-40CF-A1EE-0B1B8B43A805}" type="datetimeFigureOut">
               <a:rPr lang="ko-KR" altLang="en-US" smtClean="0"/>
               <a:pPr/>
-              <a:t>2026. 2. 24.</a:t>
+              <a:t>2026. 3. 5.</a:t>
             </a:fld>
             <a:endParaRPr lang="ko-KR" altLang="en-US"/>
           </a:p>
@@ -2925,7 +2925,7 @@
             <a:fld id="{6DD992CD-CDBB-40CF-A1EE-0B1B8B43A805}" type="datetimeFigureOut">
               <a:rPr lang="ko-KR" altLang="en-US" smtClean="0"/>
               <a:pPr/>
-              <a:t>2026. 2. 24.</a:t>
+              <a:t>2026. 3. 5.</a:t>
             </a:fld>
             <a:endParaRPr lang="ko-KR" altLang="en-US"/>
           </a:p>
@@ -3133,7 +3133,7 @@
             <a:fld id="{6DD992CD-CDBB-40CF-A1EE-0B1B8B43A805}" type="datetimeFigureOut">
               <a:rPr lang="ko-KR" altLang="en-US" smtClean="0"/>
               <a:pPr/>
-              <a:t>2026. 2. 24.</a:t>
+              <a:t>2026. 3. 5.</a:t>
             </a:fld>
             <a:endParaRPr lang="ko-KR" altLang="en-US"/>
           </a:p>
@@ -3970,14 +3970,14 @@
           <p:nvPr>
             <p:extLst>
               <p:ext uri="{D42A27DB-BD31-4B8C-83A1-F6EECF244321}">
-                <p14:modId xmlns:p14="http://schemas.microsoft.com/office/powerpoint/2010/main" val="1634125706"/>
+                <p14:modId xmlns:p14="http://schemas.microsoft.com/office/powerpoint/2010/main" val="3705349765"/>
               </p:ext>
             </p:extLst>
           </p:nvPr>
         </p:nvGraphicFramePr>
         <p:xfrm>
           <a:off x="332656" y="3232744"/>
-          <a:ext cx="6192689" cy="547200"/>
+          <a:ext cx="6170116" cy="547200"/>
         </p:xfrm>
         <a:graphic>
           <a:graphicData uri="http://schemas.openxmlformats.org/drawingml/2006/table">
@@ -3991,21 +3991,21 @@
                     </a:ext>
                   </a:extLst>
                 </a:gridCol>
-                <a:gridCol w="1138413">
+                <a:gridCol w="1260000">
                   <a:extLst>
                     <a:ext uri="{9D8B030D-6E8A-4147-A177-3AD203B41FA5}">
                       <a16:colId xmlns:a16="http://schemas.microsoft.com/office/drawing/2014/main" val="20001"/>
                     </a:ext>
                   </a:extLst>
                 </a:gridCol>
-                <a:gridCol w="936104">
+                <a:gridCol w="864000">
                   <a:extLst>
                     <a:ext uri="{9D8B030D-6E8A-4147-A177-3AD203B41FA5}">
                       <a16:colId xmlns:a16="http://schemas.microsoft.com/office/drawing/2014/main" val="20002"/>
                     </a:ext>
                   </a:extLst>
                 </a:gridCol>
-                <a:gridCol w="504056">
+                <a:gridCol w="432000">
                   <a:extLst>
                     <a:ext uri="{9D8B030D-6E8A-4147-A177-3AD203B41FA5}">
                       <a16:colId xmlns:a16="http://schemas.microsoft.com/office/drawing/2014/main" val="20004"/>
@@ -8845,14 +8845,14 @@
           <p:nvPr>
             <p:extLst>
               <p:ext uri="{D42A27DB-BD31-4B8C-83A1-F6EECF244321}">
-                <p14:modId xmlns:p14="http://schemas.microsoft.com/office/powerpoint/2010/main" val="771264514"/>
+                <p14:modId xmlns:p14="http://schemas.microsoft.com/office/powerpoint/2010/main" val="2539480998"/>
               </p:ext>
             </p:extLst>
           </p:nvPr>
         </p:nvGraphicFramePr>
         <p:xfrm>
           <a:off x="280355" y="784632"/>
-          <a:ext cx="6316998" cy="835200"/>
+          <a:ext cx="6325971" cy="547200"/>
         </p:xfrm>
         <a:graphic>
           <a:graphicData uri="http://schemas.openxmlformats.org/drawingml/2006/table">
@@ -8866,21 +8866,21 @@
                     </a:ext>
                   </a:extLst>
                 </a:gridCol>
-                <a:gridCol w="1106867">
+                <a:gridCol w="1260000">
                   <a:extLst>
                     <a:ext uri="{9D8B030D-6E8A-4147-A177-3AD203B41FA5}">
                       <a16:colId xmlns:a16="http://schemas.microsoft.com/office/drawing/2014/main" val="20001"/>
                     </a:ext>
                   </a:extLst>
                 </a:gridCol>
-                <a:gridCol w="936104">
+                <a:gridCol w="864000">
                   <a:extLst>
                     <a:ext uri="{9D8B030D-6E8A-4147-A177-3AD203B41FA5}">
                       <a16:colId xmlns:a16="http://schemas.microsoft.com/office/drawing/2014/main" val="20002"/>
                     </a:ext>
                   </a:extLst>
                 </a:gridCol>
-                <a:gridCol w="504056">
+                <a:gridCol w="432000">
                   <a:extLst>
                     <a:ext uri="{9D8B030D-6E8A-4147-A177-3AD203B41FA5}">
                       <a16:colId xmlns:a16="http://schemas.microsoft.com/office/drawing/2014/main" val="20004"/>
@@ -9582,299 +9582,6 @@
                 <a:extLst>
                   <a:ext uri="{0D108BD9-81ED-4DB2-BD59-A6C34878D82A}">
                     <a16:rowId xmlns:a16="http://schemas.microsoft.com/office/drawing/2014/main" val="10001"/>
-                  </a:ext>
-                </a:extLst>
-              </a:tr>
-              <a:tr h="288000">
-                <a:tc>
-                  <a:txBody>
-                    <a:bodyPr/>
-                    <a:lstStyle/>
-                    <a:p>
-                      <a:pPr algn="ctr" fontAlgn="ctr"/>
-                      <a:endParaRPr lang="en-US" sz="800" b="1" i="0" u="none" strike="noStrike" dirty="0">
-                        <a:solidFill>
-                          <a:srgbClr val="FF0000"/>
-                        </a:solidFill>
-                        <a:effectLst/>
-                        <a:latin typeface="+mn-ea"/>
-                        <a:ea typeface="+mn-ea"/>
-                      </a:endParaRPr>
-                    </a:p>
-                  </a:txBody>
-                  <a:tcPr marL="5625" marR="5625" marT="5625" marB="0" anchor="ctr">
-                    <a:lnL>
-                      <a:noFill/>
-                    </a:lnL>
-                    <a:lnR>
-                      <a:noFill/>
-                    </a:lnR>
-                    <a:lnT w="6350" cap="flat" cmpd="sng" algn="ctr">
-                      <a:solidFill>
-                        <a:srgbClr val="000000"/>
-                      </a:solidFill>
-                      <a:prstDash val="solid"/>
-                      <a:round/>
-                      <a:headEnd type="none" w="med" len="med"/>
-                      <a:tailEnd type="none" w="med" len="med"/>
-                    </a:lnT>
-                    <a:lnB w="6350" cap="flat" cmpd="sng" algn="ctr">
-                      <a:solidFill>
-                        <a:srgbClr val="000000"/>
-                      </a:solidFill>
-                      <a:prstDash val="solid"/>
-                      <a:round/>
-                      <a:headEnd type="none" w="med" len="med"/>
-                      <a:tailEnd type="none" w="med" len="med"/>
-                    </a:lnB>
-                    <a:solidFill>
-                      <a:srgbClr val="FFFFFF"/>
-                    </a:solidFill>
-                  </a:tcPr>
-                </a:tc>
-                <a:tc>
-                  <a:txBody>
-                    <a:bodyPr/>
-                    <a:lstStyle/>
-                    <a:p>
-                      <a:pPr algn="ctr" fontAlgn="ctr"/>
-                      <a:endParaRPr lang="en-US" sz="800" b="1" i="0" u="none" strike="noStrike" dirty="0">
-                        <a:solidFill>
-                          <a:srgbClr val="FF0000"/>
-                        </a:solidFill>
-                        <a:effectLst/>
-                        <a:latin typeface="+mn-ea"/>
-                        <a:ea typeface="+mn-ea"/>
-                      </a:endParaRPr>
-                    </a:p>
-                  </a:txBody>
-                  <a:tcPr marL="5625" marR="5625" marT="5625" marB="0" anchor="ctr">
-                    <a:lnL>
-                      <a:noFill/>
-                    </a:lnL>
-                    <a:lnR>
-                      <a:noFill/>
-                    </a:lnR>
-                    <a:lnT w="6350" cap="flat" cmpd="sng" algn="ctr">
-                      <a:solidFill>
-                        <a:srgbClr val="000000"/>
-                      </a:solidFill>
-                      <a:prstDash val="solid"/>
-                      <a:round/>
-                      <a:headEnd type="none" w="med" len="med"/>
-                      <a:tailEnd type="none" w="med" len="med"/>
-                    </a:lnT>
-                    <a:lnB w="6350" cap="flat" cmpd="sng" algn="ctr">
-                      <a:solidFill>
-                        <a:srgbClr val="000000"/>
-                      </a:solidFill>
-                      <a:prstDash val="solid"/>
-                      <a:round/>
-                      <a:headEnd type="none" w="med" len="med"/>
-                      <a:tailEnd type="none" w="med" len="med"/>
-                    </a:lnB>
-                    <a:solidFill>
-                      <a:srgbClr val="FFFFFF"/>
-                    </a:solidFill>
-                  </a:tcPr>
-                </a:tc>
-                <a:tc>
-                  <a:txBody>
-                    <a:bodyPr/>
-                    <a:lstStyle/>
-                    <a:p>
-                      <a:pPr algn="ctr" fontAlgn="ctr"/>
-                      <a:endParaRPr lang="en-US" sz="800" b="1" i="0" u="none" strike="noStrike" dirty="0">
-                        <a:solidFill>
-                          <a:srgbClr val="FF0000"/>
-                        </a:solidFill>
-                        <a:effectLst/>
-                        <a:latin typeface="+mn-ea"/>
-                        <a:ea typeface="+mn-ea"/>
-                      </a:endParaRPr>
-                    </a:p>
-                  </a:txBody>
-                  <a:tcPr marL="5625" marR="5625" marT="5625" marB="0" anchor="ctr">
-                    <a:lnL>
-                      <a:noFill/>
-                    </a:lnL>
-                    <a:lnR>
-                      <a:noFill/>
-                    </a:lnR>
-                    <a:lnT w="6350" cap="flat" cmpd="sng" algn="ctr">
-                      <a:solidFill>
-                        <a:srgbClr val="000000"/>
-                      </a:solidFill>
-                      <a:prstDash val="solid"/>
-                      <a:round/>
-                      <a:headEnd type="none" w="med" len="med"/>
-                      <a:tailEnd type="none" w="med" len="med"/>
-                    </a:lnT>
-                    <a:lnB w="6350" cap="flat" cmpd="sng" algn="ctr">
-                      <a:solidFill>
-                        <a:srgbClr val="000000"/>
-                      </a:solidFill>
-                      <a:prstDash val="solid"/>
-                      <a:round/>
-                      <a:headEnd type="none" w="med" len="med"/>
-                      <a:tailEnd type="none" w="med" len="med"/>
-                    </a:lnB>
-                  </a:tcPr>
-                </a:tc>
-                <a:tc>
-                  <a:txBody>
-                    <a:bodyPr/>
-                    <a:lstStyle/>
-                    <a:p>
-                      <a:pPr algn="ctr" fontAlgn="ctr"/>
-                      <a:endParaRPr lang="en-US" altLang="ko-KR" sz="800" b="1" i="0" u="none" strike="noStrike" dirty="0">
-                        <a:solidFill>
-                          <a:srgbClr val="FF0000"/>
-                        </a:solidFill>
-                        <a:effectLst/>
-                        <a:latin typeface="+mn-ea"/>
-                        <a:ea typeface="+mn-ea"/>
-                      </a:endParaRPr>
-                    </a:p>
-                  </a:txBody>
-                  <a:tcPr marL="5625" marR="5625" marT="5625" marB="0" anchor="ctr">
-                    <a:lnL>
-                      <a:noFill/>
-                    </a:lnL>
-                    <a:lnR>
-                      <a:noFill/>
-                    </a:lnR>
-                    <a:lnT w="6350" cap="flat" cmpd="sng" algn="ctr">
-                      <a:solidFill>
-                        <a:srgbClr val="000000"/>
-                      </a:solidFill>
-                      <a:prstDash val="solid"/>
-                      <a:round/>
-                      <a:headEnd type="none" w="med" len="med"/>
-                      <a:tailEnd type="none" w="med" len="med"/>
-                    </a:lnT>
-                    <a:lnB w="6350" cap="flat" cmpd="sng" algn="ctr">
-                      <a:solidFill>
-                        <a:srgbClr val="000000"/>
-                      </a:solidFill>
-                      <a:prstDash val="solid"/>
-                      <a:round/>
-                      <a:headEnd type="none" w="med" len="med"/>
-                      <a:tailEnd type="none" w="med" len="med"/>
-                    </a:lnB>
-                    <a:solidFill>
-                      <a:srgbClr val="FFFFFF"/>
-                    </a:solidFill>
-                  </a:tcPr>
-                </a:tc>
-                <a:tc>
-                  <a:txBody>
-                    <a:bodyPr/>
-                    <a:lstStyle/>
-                    <a:p>
-                      <a:pPr algn="ctr" fontAlgn="ctr"/>
-                      <a:endParaRPr lang="en-US" sz="800" b="1" i="0" u="none" strike="noStrike" dirty="0">
-                        <a:solidFill>
-                          <a:srgbClr val="FF0000"/>
-                        </a:solidFill>
-                        <a:effectLst/>
-                        <a:latin typeface="+mn-ea"/>
-                        <a:ea typeface="+mn-ea"/>
-                      </a:endParaRPr>
-                    </a:p>
-                  </a:txBody>
-                  <a:tcPr marL="5625" marR="5625" marT="5625" marB="0" anchor="ctr">
-                    <a:lnL>
-                      <a:noFill/>
-                    </a:lnL>
-                    <a:lnR>
-                      <a:noFill/>
-                    </a:lnR>
-                    <a:lnT w="6350" cap="flat" cmpd="sng" algn="ctr">
-                      <a:solidFill>
-                        <a:srgbClr val="000000"/>
-                      </a:solidFill>
-                      <a:prstDash val="solid"/>
-                      <a:round/>
-                      <a:headEnd type="none" w="med" len="med"/>
-                      <a:tailEnd type="none" w="med" len="med"/>
-                    </a:lnT>
-                    <a:lnB w="6350" cap="flat" cmpd="sng" algn="ctr">
-                      <a:solidFill>
-                        <a:srgbClr val="000000"/>
-                      </a:solidFill>
-                      <a:prstDash val="solid"/>
-                      <a:round/>
-                      <a:headEnd type="none" w="med" len="med"/>
-                      <a:tailEnd type="none" w="med" len="med"/>
-                    </a:lnB>
-                  </a:tcPr>
-                </a:tc>
-                <a:tc>
-                  <a:txBody>
-                    <a:bodyPr/>
-                    <a:lstStyle/>
-                    <a:p>
-                      <a:pPr marL="0" marR="0" lvl="0" indent="0" algn="ctr" defTabSz="914400" rtl="0" eaLnBrk="1" fontAlgn="ctr" latinLnBrk="1" hangingPunct="1">
-                        <a:lnSpc>
-                          <a:spcPct val="100000"/>
-                        </a:lnSpc>
-                        <a:spcBef>
-                          <a:spcPts val="0"/>
-                        </a:spcBef>
-                        <a:spcAft>
-                          <a:spcPts val="0"/>
-                        </a:spcAft>
-                        <a:buClrTx/>
-                        <a:buSzTx/>
-                        <a:buFontTx/>
-                        <a:buNone/>
-                        <a:tabLst/>
-                        <a:defRPr/>
-                      </a:pPr>
-                      <a:endParaRPr lang="en-US" altLang="ko-KR" sz="800" b="1" i="0" u="none" strike="noStrike" kern="1200" dirty="0">
-                        <a:solidFill>
-                          <a:srgbClr val="FF0000"/>
-                        </a:solidFill>
-                        <a:latin typeface="+mn-ea"/>
-                        <a:ea typeface="+mn-ea"/>
-                        <a:cs typeface="+mn-cs"/>
-                      </a:endParaRPr>
-                    </a:p>
-                  </a:txBody>
-                  <a:tcPr marL="5625" marR="5625" marT="5625" marB="0" anchor="ctr">
-                    <a:lnL>
-                      <a:noFill/>
-                    </a:lnL>
-                    <a:lnR>
-                      <a:noFill/>
-                    </a:lnR>
-                    <a:lnT w="6350" cap="flat" cmpd="sng" algn="ctr">
-                      <a:solidFill>
-                        <a:srgbClr val="000000"/>
-                      </a:solidFill>
-                      <a:prstDash val="solid"/>
-                      <a:round/>
-                      <a:headEnd type="none" w="med" len="med"/>
-                      <a:tailEnd type="none" w="med" len="med"/>
-                    </a:lnT>
-                    <a:lnB w="6350" cap="flat" cmpd="sng" algn="ctr">
-                      <a:solidFill>
-                        <a:srgbClr val="000000"/>
-                      </a:solidFill>
-                      <a:prstDash val="solid"/>
-                      <a:round/>
-                      <a:headEnd type="none" w="med" len="med"/>
-                      <a:tailEnd type="none" w="med" len="med"/>
-                    </a:lnB>
-                    <a:solidFill>
-                      <a:srgbClr val="FFFFFF"/>
-                    </a:solidFill>
-                  </a:tcPr>
-                </a:tc>
-                <a:extLst>
-                  <a:ext uri="{0D108BD9-81ED-4DB2-BD59-A6C34878D82A}">
-                    <a16:rowId xmlns:a16="http://schemas.microsoft.com/office/drawing/2014/main" val="10002"/>
                   </a:ext>
                 </a:extLst>
               </a:tr>
@@ -12549,62 +12256,62 @@
             </a:pPr>
             <a:r>
               <a:rPr lang="en-US" altLang="ko-KR" sz="900" dirty="0">
-                <a:latin typeface="+mj-lt"/>
+                <a:latin typeface="맑은 고딕"/>
                 <a:ea typeface="굴림" pitchFamily="50" charset="-127"/>
               </a:rPr>
               <a:t>* </a:t>
             </a:r>
             <a:r>
               <a:rPr lang="ko-KR" altLang="en-US" sz="900" dirty="0">
-                <a:latin typeface="+mj-lt"/>
+                <a:latin typeface="맑은 고딕"/>
                 <a:ea typeface="굴림" pitchFamily="50" charset="-127"/>
               </a:rPr>
               <a:t>본 검사의 </a:t>
             </a:r>
             <a:r>
               <a:rPr lang="en-US" altLang="ko-KR" sz="900" dirty="0">
-                <a:latin typeface="+mj-lt"/>
+                <a:latin typeface="맑은 고딕"/>
                 <a:ea typeface="굴림" pitchFamily="50" charset="-127"/>
               </a:rPr>
               <a:t>raw data (BAM, FASTQ, VCF)</a:t>
             </a:r>
             <a:r>
               <a:rPr lang="ko-KR" altLang="en-US" sz="900" dirty="0">
-                <a:latin typeface="+mj-lt"/>
+                <a:latin typeface="맑은 고딕"/>
                 <a:ea typeface="굴림" pitchFamily="50" charset="-127"/>
               </a:rPr>
               <a:t> 파일은 분자 병리 검사실 내 병리과 서버 컴퓨터에서 보관</a:t>
             </a:r>
             <a:r>
               <a:rPr lang="en-US" altLang="ko-KR" sz="900" dirty="0">
-                <a:latin typeface="+mj-lt"/>
+                <a:latin typeface="맑은 고딕"/>
                 <a:ea typeface="굴림" pitchFamily="50" charset="-127"/>
               </a:rPr>
               <a:t>, </a:t>
             </a:r>
             <a:r>
               <a:rPr lang="ko-KR" altLang="en-US" sz="900" dirty="0">
-                <a:latin typeface="+mj-lt"/>
+                <a:latin typeface="맑은 고딕"/>
                 <a:ea typeface="굴림" pitchFamily="50" charset="-127"/>
               </a:rPr>
               <a:t>관리되고 있습니다</a:t>
             </a:r>
             <a:r>
               <a:rPr lang="en-US" altLang="ko-KR" sz="900" dirty="0">
-                <a:latin typeface="+mj-lt"/>
+                <a:latin typeface="맑은 고딕"/>
                 <a:ea typeface="굴림" pitchFamily="50" charset="-127"/>
               </a:rPr>
               <a:t>.</a:t>
             </a:r>
             <a:r>
               <a:rPr lang="ko-KR" altLang="en-US" sz="900" dirty="0">
-                <a:latin typeface="+mj-lt"/>
+                <a:latin typeface="맑은 고딕"/>
                 <a:ea typeface="굴림" pitchFamily="50" charset="-127"/>
               </a:rPr>
               <a:t> </a:t>
             </a:r>
             <a:endParaRPr lang="en-US" altLang="ko-KR" sz="900" dirty="0">
-              <a:latin typeface="+mj-lt"/>
+              <a:latin typeface="맑은 고딕"/>
               <a:ea typeface="굴림" pitchFamily="50" charset="-127"/>
             </a:endParaRPr>
           </a:p>
@@ -12616,56 +12323,56 @@
             </a:pPr>
             <a:r>
               <a:rPr lang="en-US" altLang="ko-KR" sz="900" dirty="0">
-                <a:latin typeface="+mj-lt"/>
+                <a:latin typeface="맑은 고딕"/>
                 <a:ea typeface="굴림" pitchFamily="50" charset="-127"/>
               </a:rPr>
               <a:t>*</a:t>
             </a:r>
             <a:r>
               <a:rPr lang="ko-KR" altLang="en-US" sz="900" dirty="0">
-                <a:latin typeface="+mj-lt"/>
+                <a:latin typeface="맑은 고딕"/>
                 <a:ea typeface="굴림" pitchFamily="50" charset="-127"/>
               </a:rPr>
               <a:t> 본 검사의 결과는 </a:t>
             </a:r>
             <a:r>
               <a:rPr lang="ko-KR" altLang="en-US" sz="900" dirty="0" err="1">
-                <a:latin typeface="+mj-lt"/>
+                <a:latin typeface="맑은 고딕"/>
                 <a:ea typeface="굴림" pitchFamily="50" charset="-127"/>
               </a:rPr>
               <a:t>검체에</a:t>
             </a:r>
             <a:r>
               <a:rPr lang="ko-KR" altLang="en-US" sz="900" dirty="0">
-                <a:latin typeface="+mj-lt"/>
+                <a:latin typeface="맑은 고딕"/>
                 <a:ea typeface="굴림" pitchFamily="50" charset="-127"/>
               </a:rPr>
               <a:t> 포함된 정상세포와 암세포의 비율에 따라  </a:t>
             </a:r>
             <a:r>
               <a:rPr lang="ko-KR" altLang="en-US" sz="900" dirty="0" err="1">
-                <a:latin typeface="+mj-lt"/>
+                <a:latin typeface="맑은 고딕"/>
                 <a:ea typeface="굴림" pitchFamily="50" charset="-127"/>
               </a:rPr>
               <a:t>위음성의</a:t>
             </a:r>
             <a:r>
               <a:rPr lang="ko-KR" altLang="en-US" sz="900" dirty="0">
-                <a:latin typeface="+mj-lt"/>
+                <a:latin typeface="맑은 고딕"/>
                 <a:ea typeface="굴림" pitchFamily="50" charset="-127"/>
               </a:rPr>
               <a:t> 결과를 배제 할 수 없습니다</a:t>
             </a:r>
             <a:r>
               <a:rPr lang="en-US" altLang="ko-KR" sz="900" dirty="0">
-                <a:latin typeface="+mj-lt"/>
+                <a:latin typeface="맑은 고딕"/>
                 <a:ea typeface="굴림" pitchFamily="50" charset="-127"/>
               </a:rPr>
               <a:t>.</a:t>
             </a:r>
             <a:r>
               <a:rPr lang="ko-KR" altLang="en-US" sz="900" dirty="0">
-                <a:latin typeface="+mj-lt"/>
+                <a:latin typeface="맑은 고딕"/>
                 <a:ea typeface="굴림" pitchFamily="50" charset="-127"/>
               </a:rPr>
               <a:t> </a:t>
@@ -12982,37 +12689,37 @@
             </a:pPr>
             <a:r>
               <a:rPr lang="ko-KR" altLang="en-US" sz="1000" b="1" dirty="0">
-                <a:latin typeface="+mj-lt"/>
+                <a:latin typeface="맑은 고딕"/>
               </a:rPr>
               <a:t>검사시약 </a:t>
             </a:r>
             <a:r>
               <a:rPr lang="en-US" altLang="ko-KR" sz="1000" b="1" dirty="0">
-                <a:latin typeface="+mj-lt"/>
+                <a:latin typeface="맑은 고딕"/>
               </a:rPr>
               <a:t>: </a:t>
             </a:r>
             <a:r>
               <a:rPr lang="en-US" altLang="ko-KR" sz="1000" dirty="0" err="1">
-                <a:latin typeface="+mj-lt"/>
+                <a:latin typeface="맑은 고딕"/>
               </a:rPr>
               <a:t>AllPrep</a:t>
             </a:r>
             <a:r>
               <a:rPr lang="en-US" altLang="ko-KR" sz="1000" dirty="0">
-                <a:latin typeface="+mj-lt"/>
+                <a:latin typeface="맑은 고딕"/>
               </a:rPr>
               <a:t> DNA/RNA FFPE Kit (50) [Qiagen], TruSight™ Oncology 500</a:t>
             </a:r>
             <a:r>
               <a:rPr lang="ko-KR" altLang="en-US" sz="1000" dirty="0">
-                <a:latin typeface="+mj-lt"/>
+                <a:latin typeface="맑은 고딕"/>
               </a:rPr>
               <a:t> </a:t>
             </a:r>
             <a:r>
               <a:rPr lang="en-US" altLang="ko-KR" sz="1000" dirty="0">
-                <a:latin typeface="+mj-lt"/>
+                <a:latin typeface="맑은 고딕"/>
               </a:rPr>
               <a:t>v2 kit [Illumina]</a:t>
             </a:r>
@@ -13025,13 +12732,13 @@
             </a:pPr>
             <a:r>
               <a:rPr lang="ko-KR" altLang="en-US" sz="1000" b="1" dirty="0">
-                <a:latin typeface="+mj-lt"/>
+                <a:latin typeface="맑은 고딕"/>
               </a:rPr>
               <a:t>검사방법 </a:t>
             </a:r>
             <a:r>
               <a:rPr lang="en-US" altLang="ko-KR" sz="1000" b="1" dirty="0">
-                <a:latin typeface="+mj-lt"/>
+                <a:latin typeface="맑은 고딕"/>
               </a:rPr>
               <a:t>: </a:t>
             </a:r>
@@ -13040,7 +12747,7 @@
               <a:t>NGS targeted DNA/RNA sequencing (Library : Hybrid capture)</a:t>
             </a:r>
             <a:endParaRPr lang="en-US" altLang="ko-KR" sz="1000" dirty="0">
-              <a:latin typeface="+mj-lt"/>
+              <a:latin typeface="맑은 고딕"/>
             </a:endParaRPr>
           </a:p>
         </p:txBody>
@@ -13197,7 +12904,7 @@
                   <a:srgbClr val="000000"/>
                 </a:solidFill>
                 <a:effectLst/>
-                <a:latin typeface="+mj-lt"/>
+                <a:latin typeface="맑은 고딕"/>
                 <a:ea typeface="맑은 고딕" pitchFamily="50" charset="-127"/>
                 <a:cs typeface="Arial" pitchFamily="34" charset="0"/>
               </a:rPr>
@@ -13212,7 +12919,7 @@
                   <a:srgbClr val="000000"/>
                 </a:solidFill>
                 <a:effectLst/>
-                <a:latin typeface="+mj-lt"/>
+                <a:latin typeface="맑은 고딕"/>
                 <a:ea typeface="맑은 고딕" pitchFamily="50" charset="-127"/>
                 <a:cs typeface="Arial" pitchFamily="34" charset="0"/>
               </a:rPr>
@@ -13227,7 +12934,7 @@
                   <a:srgbClr val="000000"/>
                 </a:solidFill>
                 <a:effectLst/>
-                <a:latin typeface="+mj-lt"/>
+                <a:latin typeface="맑은 고딕"/>
                 <a:ea typeface="맑은 고딕" pitchFamily="50" charset="-127"/>
                 <a:cs typeface="Arial" pitchFamily="34" charset="0"/>
               </a:rPr>
@@ -13242,7 +12949,7 @@
                   <a:srgbClr val="000000"/>
                 </a:solidFill>
                 <a:effectLst/>
-                <a:latin typeface="+mj-lt"/>
+                <a:latin typeface="맑은 고딕"/>
                 <a:ea typeface="맑은 고딕" pitchFamily="50" charset="-127"/>
                 <a:cs typeface="Arial" pitchFamily="34" charset="0"/>
               </a:rPr>
@@ -13257,7 +12964,7 @@
                   <a:srgbClr val="000000"/>
                 </a:solidFill>
                 <a:effectLst/>
-                <a:latin typeface="+mj-lt"/>
+                <a:latin typeface="맑은 고딕"/>
                 <a:ea typeface="맑은 고딕" pitchFamily="50" charset="-127"/>
                 <a:cs typeface="Arial" pitchFamily="34" charset="0"/>
               </a:rPr>
@@ -13271,7 +12978,7 @@
               <a:t>, Fold change &lt;0.5 or &gt;1.5 </a:t>
             </a:r>
             <a:endParaRPr kumimoji="1" lang="en-US" altLang="ko-KR" sz="1000" dirty="0">
-              <a:latin typeface="+mj-lt"/>
+              <a:latin typeface="맑은 고딕"/>
               <a:ea typeface="굴림" pitchFamily="50" charset="-127"/>
               <a:cs typeface="Arial" pitchFamily="34" charset="0"/>
             </a:endParaRPr>
@@ -13297,7 +13004,7 @@
                   <a:srgbClr val="000000"/>
                 </a:solidFill>
                 <a:effectLst/>
-                <a:latin typeface="+mj-lt"/>
+                <a:latin typeface="맑은 고딕"/>
                 <a:ea typeface="맑은 고딕" pitchFamily="50" charset="-127"/>
                 <a:cs typeface="Arial" pitchFamily="34" charset="0"/>
               </a:rPr>
@@ -13312,7 +13019,7 @@
                   <a:srgbClr val="000000"/>
                 </a:solidFill>
                 <a:effectLst/>
-                <a:latin typeface="+mj-lt"/>
+                <a:latin typeface="맑은 고딕"/>
                 <a:ea typeface="맑은 고딕" pitchFamily="50" charset="-127"/>
                 <a:cs typeface="Arial" pitchFamily="34" charset="0"/>
               </a:rPr>
@@ -13323,7 +13030,7 @@
                 <a:solidFill>
                   <a:srgbClr val="000000"/>
                 </a:solidFill>
-                <a:latin typeface="+mj-lt"/>
+                <a:latin typeface="맑은 고딕"/>
                 <a:ea typeface="맑은 고딕" pitchFamily="50" charset="-127"/>
                 <a:cs typeface="Arial" pitchFamily="34" charset="0"/>
               </a:rPr>
@@ -13338,7 +13045,7 @@
                   <a:srgbClr val="000000"/>
                 </a:solidFill>
                 <a:effectLst/>
-                <a:latin typeface="+mj-lt"/>
+                <a:latin typeface="맑은 고딕"/>
                 <a:ea typeface="맑은 고딕" pitchFamily="50" charset="-127"/>
                 <a:cs typeface="Arial" pitchFamily="34" charset="0"/>
               </a:rPr>
@@ -13352,7 +13059,7 @@
                 <a:schemeClr val="tx1"/>
               </a:solidFill>
               <a:effectLst/>
-              <a:latin typeface="+mj-lt"/>
+              <a:latin typeface="맑은 고딕"/>
               <a:ea typeface="굴림" pitchFamily="50" charset="-127"/>
               <a:cs typeface="굴림" pitchFamily="50" charset="-127"/>
             </a:endParaRPr>
@@ -13601,24 +13308,24 @@
             </a:pPr>
             <a:r>
               <a:rPr lang="en-US" altLang="ko-KR" sz="1000" b="1" dirty="0">
-                <a:latin typeface="+mj-lt"/>
+                <a:latin typeface="맑은 고딕"/>
               </a:rPr>
               <a:t>Reference genome : </a:t>
             </a:r>
             <a:r>
               <a:rPr lang="en-US" altLang="ko-KR" sz="1000" dirty="0" err="1">
-                <a:latin typeface="+mj-lt"/>
+                <a:latin typeface="맑은 고딕"/>
               </a:rPr>
               <a:t>Homo_sapiens</a:t>
             </a:r>
             <a:r>
               <a:rPr lang="en-US" altLang="ko-KR" sz="1000" dirty="0">
-                <a:latin typeface="+mj-lt"/>
+                <a:latin typeface="맑은 고딕"/>
               </a:rPr>
               <a:t>/ UCSC/ hg19 </a:t>
             </a:r>
             <a:endParaRPr lang="ko-KR" altLang="en-US" sz="1000" dirty="0">
-              <a:latin typeface="+mj-lt"/>
+              <a:latin typeface="맑은 고딕"/>
             </a:endParaRPr>
           </a:p>
         </p:txBody>
@@ -16312,12 +16019,12 @@
             </a:pPr>
             <a:r>
               <a:rPr lang="en-US" altLang="ko-KR" sz="1000" b="1" dirty="0">
-                <a:latin typeface="+mj-lt"/>
+                <a:latin typeface="맑은 고딕"/>
               </a:rPr>
               <a:t>Batch :</a:t>
             </a:r>
             <a:endParaRPr lang="ko-KR" altLang="en-US" sz="1000" dirty="0">
-              <a:latin typeface="+mj-lt"/>
+              <a:latin typeface="맑은 고딕"/>
             </a:endParaRPr>
           </a:p>
         </p:txBody>
@@ -40092,13 +39799,13 @@
         <a:srgbClr val="800080"/>
       </a:folHlink>
     </a:clrScheme>
-    <a:fontScheme name="Office">
+    <a:fontScheme name="Custom_NGS">
       <a:majorFont>
-        <a:latin typeface="맑은 고딕"/>
-        <a:ea typeface=""/>
+        <a:latin typeface="Calibri"/>
+        <a:ea typeface="바탕"/>
         <a:cs typeface=""/>
         <a:font script="Jpan" typeface="ＭＳ Ｐゴシック"/>
-        <a:font script="Hang" typeface="맑은 고딕"/>
+        <a:font script="Hang" typeface="바탕"/>
         <a:font script="Hans" typeface="宋体"/>
         <a:font script="Hant" typeface="新細明體"/>
         <a:font script="Arab" typeface="Times New Roman"/>
@@ -40129,7 +39836,7 @@
       </a:majorFont>
       <a:minorFont>
         <a:latin typeface="맑은 고딕"/>
-        <a:ea typeface=""/>
+        <a:ea typeface="맑은 고딕"/>
         <a:cs typeface=""/>
         <a:font script="Jpan" typeface="ＭＳ Ｐゴシック"/>
         <a:font script="Hang" typeface="맑은 고딕"/>
@@ -40375,13 +40082,13 @@
         <a:srgbClr val="800080"/>
       </a:folHlink>
     </a:clrScheme>
-    <a:fontScheme name="Office">
+    <a:fontScheme name="Custom_NGS">
       <a:majorFont>
-        <a:latin typeface="맑은 고딕"/>
-        <a:ea typeface=""/>
+        <a:latin typeface="Calibri"/>
+        <a:ea typeface="바탕"/>
         <a:cs typeface=""/>
         <a:font script="Jpan" typeface="ＭＳ Ｐゴシック"/>
-        <a:font script="Hang" typeface="맑은 고딕"/>
+        <a:font script="Hang" typeface="바탕"/>
         <a:font script="Hans" typeface="宋体"/>
         <a:font script="Hant" typeface="新細明體"/>
         <a:font script="Arab" typeface="Times New Roman"/>
@@ -40412,7 +40119,7 @@
       </a:majorFont>
       <a:minorFont>
         <a:latin typeface="맑은 고딕"/>
-        <a:ea typeface=""/>
+        <a:ea typeface="맑은 고딕"/>
         <a:cs typeface=""/>
         <a:font script="Jpan" typeface="ＭＳ Ｐゴシック"/>
         <a:font script="Hang" typeface="맑은 고딕"/>
